--- a/onboarding_slides/GNCSoftware01.pptx
+++ b/onboarding_slides/GNCSoftware01.pptx
@@ -888,7 +888,7 @@
             <a:fld id="{B61BEF0D-F0BB-DE4B-95CE-6DB70DBA9567}" type="datetimeFigureOut">
               <a:rPr lang="en-US" dirty="0"/>
               <a:pPr/>
-              <a:t>8/17/25</a:t>
+              <a:t>8/23/25</a:t>
             </a:fld>
             <a:endParaRPr lang="en-US" dirty="0"/>
           </a:p>
@@ -1136,7 +1136,7 @@
             <a:fld id="{B61BEF0D-F0BB-DE4B-95CE-6DB70DBA9567}" type="datetimeFigureOut">
               <a:rPr lang="en-US" dirty="0"/>
               <a:pPr/>
-              <a:t>8/17/25</a:t>
+              <a:t>8/23/25</a:t>
             </a:fld>
             <a:endParaRPr lang="en-US" dirty="0"/>
           </a:p>
@@ -1447,7 +1447,7 @@
             <a:fld id="{B61BEF0D-F0BB-DE4B-95CE-6DB70DBA9567}" type="datetimeFigureOut">
               <a:rPr lang="en-US" dirty="0"/>
               <a:pPr/>
-              <a:t>8/17/25</a:t>
+              <a:t>8/23/25</a:t>
             </a:fld>
             <a:endParaRPr lang="en-US" dirty="0"/>
           </a:p>
@@ -1785,7 +1785,7 @@
             <a:fld id="{B61BEF0D-F0BB-DE4B-95CE-6DB70DBA9567}" type="datetimeFigureOut">
               <a:rPr lang="en-US" dirty="0"/>
               <a:pPr/>
-              <a:t>8/17/25</a:t>
+              <a:t>8/23/25</a:t>
             </a:fld>
             <a:endParaRPr lang="en-US" dirty="0"/>
           </a:p>
@@ -2096,7 +2096,7 @@
             <a:fld id="{B61BEF0D-F0BB-DE4B-95CE-6DB70DBA9567}" type="datetimeFigureOut">
               <a:rPr lang="en-US" dirty="0"/>
               <a:pPr/>
-              <a:t>8/17/25</a:t>
+              <a:t>8/23/25</a:t>
             </a:fld>
             <a:endParaRPr lang="en-US" dirty="0"/>
           </a:p>
@@ -2486,7 +2486,7 @@
             <a:fld id="{B61BEF0D-F0BB-DE4B-95CE-6DB70DBA9567}" type="datetimeFigureOut">
               <a:rPr lang="en-US" dirty="0"/>
               <a:pPr/>
-              <a:t>8/17/25</a:t>
+              <a:t>8/23/25</a:t>
             </a:fld>
             <a:endParaRPr lang="en-US" dirty="0"/>
           </a:p>
@@ -2652,7 +2652,7 @@
           <a:p>
             <a:fld id="{55C6B4A9-1611-4792-9094-5F34BCA07E0B}" type="datetimeFigureOut">
               <a:rPr lang="en-US" dirty="0"/>
-              <a:t>8/17/25</a:t>
+              <a:t>8/23/25</a:t>
             </a:fld>
             <a:endParaRPr lang="en-US" dirty="0"/>
           </a:p>
@@ -2828,7 +2828,7 @@
             <a:fld id="{B61BEF0D-F0BB-DE4B-95CE-6DB70DBA9567}" type="datetimeFigureOut">
               <a:rPr lang="en-US" dirty="0"/>
               <a:pPr/>
-              <a:t>8/17/25</a:t>
+              <a:t>8/23/25</a:t>
             </a:fld>
             <a:endParaRPr lang="en-US" dirty="0"/>
           </a:p>
@@ -3001,7 +3001,7 @@
             <a:fld id="{B61BEF0D-F0BB-DE4B-95CE-6DB70DBA9567}" type="datetimeFigureOut">
               <a:rPr lang="en-US" dirty="0"/>
               <a:pPr/>
-              <a:t>8/17/25</a:t>
+              <a:t>8/23/25</a:t>
             </a:fld>
             <a:endParaRPr lang="en-US" dirty="0"/>
           </a:p>
@@ -3245,7 +3245,7 @@
             <a:fld id="{B61BEF0D-F0BB-DE4B-95CE-6DB70DBA9567}" type="datetimeFigureOut">
               <a:rPr lang="en-US" dirty="0"/>
               <a:pPr/>
-              <a:t>8/17/25</a:t>
+              <a:t>8/23/25</a:t>
             </a:fld>
             <a:endParaRPr lang="en-US" dirty="0"/>
           </a:p>
@@ -3473,7 +3473,7 @@
           <a:p>
             <a:fld id="{EB712588-04B1-427B-82EE-E8DB90309F08}" type="datetimeFigureOut">
               <a:rPr lang="en-US" dirty="0"/>
-              <a:t>8/17/25</a:t>
+              <a:t>8/23/25</a:t>
             </a:fld>
             <a:endParaRPr lang="en-US" dirty="0"/>
           </a:p>
@@ -3843,7 +3843,7 @@
             <a:fld id="{B61BEF0D-F0BB-DE4B-95CE-6DB70DBA9567}" type="datetimeFigureOut">
               <a:rPr lang="en-US" dirty="0"/>
               <a:pPr/>
-              <a:t>8/17/25</a:t>
+              <a:t>8/23/25</a:t>
             </a:fld>
             <a:endParaRPr lang="en-US" dirty="0"/>
           </a:p>
@@ -3963,7 +3963,7 @@
             <a:fld id="{B61BEF0D-F0BB-DE4B-95CE-6DB70DBA9567}" type="datetimeFigureOut">
               <a:rPr lang="en-US" dirty="0"/>
               <a:pPr/>
-              <a:t>8/17/25</a:t>
+              <a:t>8/23/25</a:t>
             </a:fld>
             <a:endParaRPr lang="en-US" dirty="0"/>
           </a:p>
@@ -4055,7 +4055,7 @@
             <a:fld id="{B61BEF0D-F0BB-DE4B-95CE-6DB70DBA9567}" type="datetimeFigureOut">
               <a:rPr lang="en-US" dirty="0"/>
               <a:pPr/>
-              <a:t>8/17/25</a:t>
+              <a:t>8/23/25</a:t>
             </a:fld>
             <a:endParaRPr lang="en-US" dirty="0"/>
           </a:p>
@@ -4306,7 +4306,7 @@
           <a:p>
             <a:fld id="{42A54C80-263E-416B-A8E0-580EDEADCBDC}" type="datetimeFigureOut">
               <a:rPr lang="en-US" dirty="0"/>
-              <a:t>8/17/25</a:t>
+              <a:t>8/23/25</a:t>
             </a:fld>
             <a:endParaRPr lang="en-US" dirty="0"/>
           </a:p>
@@ -4565,7 +4565,7 @@
             <a:fld id="{B61BEF0D-F0BB-DE4B-95CE-6DB70DBA9567}" type="datetimeFigureOut">
               <a:rPr lang="en-US" dirty="0"/>
               <a:pPr/>
-              <a:t>8/17/25</a:t>
+              <a:t>8/23/25</a:t>
             </a:fld>
             <a:endParaRPr lang="en-US" dirty="0"/>
           </a:p>
@@ -5305,7 +5305,7 @@
             <a:fld id="{B61BEF0D-F0BB-DE4B-95CE-6DB70DBA9567}" type="datetimeFigureOut">
               <a:rPr lang="en-US" dirty="0"/>
               <a:pPr/>
-              <a:t>8/17/25</a:t>
+              <a:t>8/23/25</a:t>
             </a:fld>
             <a:endParaRPr lang="en-US" dirty="0"/>
           </a:p>
@@ -6767,8 +6767,8 @@
         </p:nvSpPr>
         <p:spPr>
           <a:xfrm>
-            <a:off x="7181725" y="2837329"/>
-            <a:ext cx="4512988" cy="3317938"/>
+            <a:off x="7181725" y="2837328"/>
+            <a:ext cx="4512988" cy="3699395"/>
           </a:xfrm>
         </p:spPr>
         <p:txBody>
@@ -6830,7 +6830,22 @@
             </a:r>
           </a:p>
           <a:p>
-            <a:pPr lvl="1"/>
+            <a:r>
+              <a:rPr lang="en-US" dirty="0">
+                <a:solidFill>
+                  <a:srgbClr val="FFFFFF"/>
+                </a:solidFill>
+              </a:rPr>
+              <a:t>Demo: </a:t>
+            </a:r>
+            <a:r>
+              <a:rPr lang="en-US" i="1" dirty="0" err="1">
+                <a:solidFill>
+                  <a:srgbClr val="FFFFFF"/>
+                </a:solidFill>
+              </a:rPr>
+              <a:t>dangerous_pointers.c</a:t>
+            </a:r>
             <a:endParaRPr lang="en-US" dirty="0">
               <a:solidFill>
                 <a:srgbClr val="FFFFFF"/>
@@ -6915,13 +6930,13 @@
         </p:nvSpPr>
         <p:spPr>
           <a:xfrm>
-            <a:off x="677334" y="1297459"/>
-            <a:ext cx="8009466" cy="4028302"/>
+            <a:off x="673229" y="1424459"/>
+            <a:ext cx="8009466" cy="3781168"/>
           </a:xfrm>
         </p:spPr>
         <p:txBody>
           <a:bodyPr>
-            <a:normAutofit fontScale="92500" lnSpcReduction="10000"/>
+            <a:normAutofit fontScale="85000" lnSpcReduction="10000"/>
           </a:bodyPr>
           <a:lstStyle/>
           <a:p>
@@ -6998,6 +7013,17 @@
               <a:rPr lang="en-US" dirty="0"/>
               <a:t>We almost always avoid using malloc in GNC for this reason</a:t>
             </a:r>
+          </a:p>
+          <a:p>
+            <a:r>
+              <a:rPr lang="en-US" dirty="0"/>
+              <a:t>Demo: </a:t>
+            </a:r>
+            <a:r>
+              <a:rPr lang="en-US" i="1" dirty="0" err="1"/>
+              <a:t>malloc_free.c</a:t>
+            </a:r>
+            <a:endParaRPr lang="en-US" i="1" dirty="0"/>
           </a:p>
         </p:txBody>
       </p:sp>
@@ -7023,7 +7049,7 @@
         </p:blipFill>
         <p:spPr>
           <a:xfrm>
-            <a:off x="1115710" y="5115696"/>
+            <a:off x="993432" y="5220730"/>
             <a:ext cx="7377269" cy="1488990"/>
           </a:xfrm>
           <a:prstGeom prst="rect">
@@ -7830,7 +7856,7 @@
         <p:spPr>
           <a:xfrm>
             <a:off x="4062394" y="2160589"/>
-            <a:ext cx="5211607" cy="3880773"/>
+            <a:ext cx="5211607" cy="4326708"/>
           </a:xfrm>
         </p:spPr>
         <p:txBody>
@@ -7979,14 +8005,6 @@
               <a:rPr lang="en-US" sz="1500" dirty="0" err="1"/>
               <a:t>main.c</a:t>
             </a:r>
-            <a:endParaRPr lang="en-US" sz="1500" dirty="0"/>
-          </a:p>
-          <a:p>
-            <a:pPr>
-              <a:lnSpc>
-                <a:spcPct val="90000"/>
-              </a:lnSpc>
-            </a:pPr>
             <a:endParaRPr lang="en-US" sz="1500" dirty="0"/>
           </a:p>
         </p:txBody>
@@ -8212,6 +8230,20 @@
               <a:t>Use the #include keyword followed by the file name to tell the pre-processor to add the contents of the .h file to the start of the c file</a:t>
             </a:r>
           </a:p>
+          <a:p>
+            <a:r>
+              <a:rPr lang="en-US" sz="1800" dirty="0"/>
+              <a:t>Demo: </a:t>
+            </a:r>
+            <a:r>
+              <a:rPr lang="en-US" sz="1800" i="1" dirty="0" err="1"/>
+              <a:t>multiple_files</a:t>
+            </a:r>
+            <a:endParaRPr lang="en-US" sz="1800" dirty="0"/>
+          </a:p>
+          <a:p>
+            <a:endParaRPr lang="en-US" dirty="0"/>
+          </a:p>
         </p:txBody>
       </p:sp>
       <p:pic>
@@ -8266,7 +8298,7 @@
         </p:blipFill>
         <p:spPr>
           <a:xfrm>
-            <a:off x="460862" y="4433607"/>
+            <a:off x="460862" y="4652596"/>
             <a:ext cx="3407506" cy="1590170"/>
           </a:xfrm>
           <a:prstGeom prst="rect">
@@ -10491,6 +10523,46 @@
           </a:prstGeom>
         </p:spPr>
       </p:pic>
+      <p:sp>
+        <p:nvSpPr>
+          <p:cNvPr id="4" name="TextBox 3">
+            <a:extLst>
+              <a:ext uri="{FF2B5EF4-FFF2-40B4-BE49-F238E27FC236}">
+                <a16:creationId xmlns:a16="http://schemas.microsoft.com/office/drawing/2014/main" id="{4E87A0FC-AB09-3F71-3D7B-981E2B502464}"/>
+              </a:ext>
+            </a:extLst>
+          </p:cNvPr>
+          <p:cNvSpPr txBox="1"/>
+          <p:nvPr/>
+        </p:nvSpPr>
+        <p:spPr>
+          <a:xfrm>
+            <a:off x="1091123" y="4346763"/>
+            <a:ext cx="2432076" cy="369332"/>
+          </a:xfrm>
+          <a:prstGeom prst="rect">
+            <a:avLst/>
+          </a:prstGeom>
+          <a:noFill/>
+        </p:spPr>
+        <p:txBody>
+          <a:bodyPr wrap="none" rtlCol="0">
+            <a:spAutoFit/>
+          </a:bodyPr>
+          <a:lstStyle/>
+          <a:p>
+            <a:r>
+              <a:rPr lang="en-US" dirty="0"/>
+              <a:t>Demo: </a:t>
+            </a:r>
+            <a:r>
+              <a:rPr lang="en-US" i="1" dirty="0" err="1"/>
+              <a:t>hello_world.c</a:t>
+            </a:r>
+            <a:endParaRPr lang="en-US" dirty="0"/>
+          </a:p>
+        </p:txBody>
+      </p:sp>
     </p:spTree>
     <p:extLst>
       <p:ext uri="{BB962C8B-B14F-4D97-AF65-F5344CB8AC3E}">
@@ -11525,13 +11597,13 @@
         </p:nvSpPr>
         <p:spPr>
           <a:xfrm>
-            <a:off x="677334" y="1311939"/>
-            <a:ext cx="6448680" cy="4729424"/>
+            <a:off x="677334" y="1311938"/>
+            <a:ext cx="6448680" cy="5247611"/>
           </a:xfrm>
         </p:spPr>
         <p:txBody>
           <a:bodyPr>
-            <a:normAutofit lnSpcReduction="10000"/>
+            <a:normAutofit fontScale="92500" lnSpcReduction="20000"/>
           </a:bodyPr>
           <a:lstStyle/>
           <a:p>
@@ -11601,10 +11673,48 @@
             </a:r>
           </a:p>
           <a:p>
+            <a:pPr lvl="1"/>
+            <a:r>
+              <a:rPr lang="en-US" dirty="0"/>
+              <a:t>You can access a member of a struct using the “.” character</a:t>
+            </a:r>
+          </a:p>
+          <a:p>
+            <a:pPr lvl="2"/>
+            <a:r>
+              <a:rPr lang="en-US" dirty="0"/>
+              <a:t>Ex. </a:t>
+            </a:r>
+            <a:r>
+              <a:rPr lang="en-US" dirty="0" err="1"/>
+              <a:t>my_struct.x</a:t>
+            </a:r>
+            <a:r>
+              <a:rPr lang="en-US" dirty="0"/>
+              <a:t> or </a:t>
+            </a:r>
+            <a:r>
+              <a:rPr lang="en-US" dirty="0" err="1"/>
+              <a:t>my_struct.y</a:t>
+            </a:r>
+            <a:endParaRPr lang="en-US" dirty="0"/>
+          </a:p>
+          <a:p>
             <a:r>
               <a:rPr lang="en-US" dirty="0"/>
               <a:t>Prepending a data type with the keyword ‘const’ makes it a constant</a:t>
             </a:r>
+          </a:p>
+          <a:p>
+            <a:r>
+              <a:rPr lang="en-US" dirty="0"/>
+              <a:t>Demo: </a:t>
+            </a:r>
+            <a:r>
+              <a:rPr lang="en-US" i="1" dirty="0" err="1"/>
+              <a:t>datatypes.c</a:t>
+            </a:r>
+            <a:endParaRPr lang="en-US" dirty="0"/>
           </a:p>
           <a:p>
             <a:pPr lvl="1"/>
@@ -12933,7 +13043,7 @@
           <a:lstStyle/>
           <a:p>
             <a:r>
-              <a:rPr lang="en-US"/>
+              <a:rPr lang="en-US" dirty="0"/>
               <a:t>Function Prototypes</a:t>
             </a:r>
           </a:p>
@@ -12984,6 +13094,17 @@
               <a:rPr lang="en-US" dirty="0"/>
               <a:t>Function prototypes solve this problem by defining the input parameters and return type of the function without actually defining the body of the function</a:t>
             </a:r>
+          </a:p>
+          <a:p>
+            <a:r>
+              <a:rPr lang="en-US" dirty="0"/>
+              <a:t>Demo: </a:t>
+            </a:r>
+            <a:r>
+              <a:rPr lang="en-US" i="1" dirty="0" err="1"/>
+              <a:t>functions.c</a:t>
+            </a:r>
+            <a:endParaRPr lang="en-US" dirty="0"/>
           </a:p>
           <a:p>
             <a:pPr marL="0" indent="0">
@@ -13306,13 +13427,13 @@
         </p:nvSpPr>
         <p:spPr>
           <a:xfrm>
-            <a:off x="673754" y="2160590"/>
-            <a:ext cx="3973943" cy="3440110"/>
+            <a:off x="673754" y="2160589"/>
+            <a:ext cx="3973943" cy="4053943"/>
           </a:xfrm>
         </p:spPr>
         <p:txBody>
           <a:bodyPr>
-            <a:normAutofit fontScale="92500"/>
+            <a:normAutofit lnSpcReduction="10000"/>
           </a:bodyPr>
           <a:lstStyle/>
           <a:p>
@@ -13444,7 +13565,30 @@
               </a:rPr>
               <a:t>dereferencing</a:t>
             </a:r>
-            <a:endParaRPr lang="en-US" sz="1500" dirty="0">
+          </a:p>
+          <a:p>
+            <a:pPr>
+              <a:lnSpc>
+                <a:spcPct val="90000"/>
+              </a:lnSpc>
+            </a:pPr>
+            <a:r>
+              <a:rPr lang="en-US" sz="1700" dirty="0">
+                <a:solidFill>
+                  <a:schemeClr val="bg1"/>
+                </a:solidFill>
+              </a:rPr>
+              <a:t>Demo: </a:t>
+            </a:r>
+            <a:r>
+              <a:rPr lang="en-US" sz="1700" i="1" dirty="0" err="1">
+                <a:solidFill>
+                  <a:schemeClr val="bg1"/>
+                </a:solidFill>
+              </a:rPr>
+              <a:t>pointers.c</a:t>
+            </a:r>
+            <a:endParaRPr lang="en-US" sz="1700" dirty="0">
               <a:solidFill>
                 <a:schemeClr val="bg1"/>
               </a:solidFill>
@@ -13839,8 +13983,8 @@
         </p:nvSpPr>
         <p:spPr>
           <a:xfrm>
-            <a:off x="677334" y="1882314"/>
-            <a:ext cx="8596668" cy="3880773"/>
+            <a:off x="677334" y="1433384"/>
+            <a:ext cx="8596668" cy="4329703"/>
           </a:xfrm>
         </p:spPr>
         <p:txBody>
@@ -13865,6 +14009,25 @@
               <a:rPr lang="en-US" dirty="0"/>
               <a:t>This means that if we modify any parameters in the function itself, those modifications will not be reflected outside of the function</a:t>
             </a:r>
+          </a:p>
+          <a:p>
+            <a:r>
+              <a:rPr lang="en-US" dirty="0"/>
+              <a:t>Demo: </a:t>
+            </a:r>
+            <a:r>
+              <a:rPr lang="en-US" i="1" dirty="0" err="1"/>
+              <a:t>pass_by_value.c</a:t>
+            </a:r>
+            <a:r>
+              <a:rPr lang="en-US" i="1" dirty="0"/>
+              <a:t>, </a:t>
+            </a:r>
+            <a:r>
+              <a:rPr lang="en-US" i="1" dirty="0" err="1"/>
+              <a:t>pass_by_reference.c</a:t>
+            </a:r>
+            <a:endParaRPr lang="en-US" dirty="0"/>
           </a:p>
         </p:txBody>
       </p:sp>
